--- a/opentelemetry-signoz-observability-stack.pptx
+++ b/opentelemetry-signoz-observability-stack.pptx
@@ -3221,7 +3221,7 @@
                 </a:solidFill>
                 <a:latin typeface="Aptos"/>
               </a:rPr>
-              <a:t>Two deployment models: bare metal Docker Compose automated with Ansible, and GKE deployed through custom Pulumi SDKs wrapping the official SigNoz/OpenTelemetry charts.</a:t>
+              <a:t>From DogStatsD and Datadog to OpenTelemetry and SigNoz across a bare-metal proving ground and a dedicated GKE management cluster.</a:t>
             </a:r>
           </a:p>
         </p:txBody>
@@ -3260,7 +3260,7 @@
                 </a:solidFill>
                 <a:latin typeface="Aptos"/>
               </a:rPr>
-              <a:t>Deck is based on the deployment strategies architected for the Injective SigNoz/OpenTelemetry stack.</a:t>
+              <a:t>Migration story, deployment approach, and rollout lessons from the platform transition.</a:t>
             </a:r>
           </a:p>
         </p:txBody>
@@ -3325,7 +3325,7 @@
                 </a:solidFill>
                 <a:latin typeface="Aptos Display"/>
               </a:rPr>
-              <a:t>Why This Stack</a:t>
+              <a:t>Why We Changed</a:t>
             </a:r>
           </a:p>
         </p:txBody>
@@ -3364,7 +3364,7 @@
                 </a:solidFill>
                 <a:latin typeface="Aptos"/>
               </a:rPr>
-              <a:t>What problem the platform solves for engineering and operations</a:t>
+              <a:t>Standardize telemetry, reduce migration risk, and support both bare metal and Kubernetes</a:t>
             </a:r>
           </a:p>
         </p:txBody>
@@ -3378,7 +3378,7 @@
         <p:spPr>
           <a:xfrm>
             <a:off x="777240" y="1463040"/>
-            <a:ext cx="5303520" cy="4480560"/>
+            <a:ext cx="5303520" cy="4023360"/>
           </a:xfrm>
           <a:prstGeom prst="rect">
             <a:avLst/>
@@ -3403,7 +3403,7 @@
                 </a:solidFill>
                 <a:latin typeface="Aptos"/>
               </a:rPr>
-              <a:t>Standardize telemetry collection across services, runtimes, and environments with OpenTelemetry.</a:t>
+              <a:t>Standardize metrics, logs, traces, and checks behind one OpenTelemetry collection layer.</a:t>
             </a:r>
           </a:p>
           <a:p>
@@ -3419,7 +3419,7 @@
                 </a:solidFill>
                 <a:latin typeface="Aptos"/>
               </a:rPr>
-              <a:t>Centralize traces, metrics, and logs in SigNoz so teams can troubleshoot from one place.</a:t>
+              <a:t>Move away from environment-specific monitoring assumptions without forcing a day-one app rewrite.</a:t>
             </a:r>
           </a:p>
           <a:p>
@@ -3435,23 +3435,7 @@
                 </a:solidFill>
                 <a:latin typeface="Aptos"/>
               </a:rPr>
-              <a:t>Use environment-specific deployment models without changing the observability contract presented to applications.</a:t>
-            </a:r>
-          </a:p>
-          <a:p>
-            <a:pPr algn="l">
-              <a:spcAft>
-                <a:spcPts val="1000"/>
-              </a:spcAft>
-            </a:pPr>
-            <a:r>
-              <a:rPr sz="2000" b="0" i="0">
-                <a:solidFill>
-                  <a:srgbClr val="000000"/>
-                </a:solidFill>
-                <a:latin typeface="Aptos"/>
-              </a:rPr>
-              <a:t>Keep rollout and operations automated: Ansible for bare metal, Pulumi plus Helm for GKE.</a:t>
+              <a:t>Keep rollout automated with Ansible on bare metal and Pulumi plus Helm on GKE.</a:t>
             </a:r>
           </a:p>
         </p:txBody>
@@ -3505,7 +3489,7 @@
                 </a:solidFill>
                 <a:latin typeface="Aptos"/>
               </a:rPr>
-              <a:t>App teams emit OTLP once</a:t>
+              <a:t>No initial app rewrite</a:t>
             </a:r>
           </a:p>
         </p:txBody>
@@ -3559,7 +3543,7 @@
                 </a:solidFill>
                 <a:latin typeface="Aptos"/>
               </a:rPr>
-              <a:t>Collectors normalize and route telemetry</a:t>
+              <a:t>One collector layer</a:t>
             </a:r>
           </a:p>
         </p:txBody>
@@ -3613,7 +3597,7 @@
                 </a:solidFill>
                 <a:latin typeface="Aptos"/>
               </a:rPr>
-              <a:t>SigNoz stores, correlates, and visualizes signals</a:t>
+              <a:t>Same observability story</a:t>
             </a:r>
           </a:p>
         </p:txBody>
@@ -3678,7 +3662,7 @@
                 </a:solidFill>
                 <a:latin typeface="Aptos Display"/>
               </a:rPr>
-              <a:t>Migration Strategy</a:t>
+              <a:t>Compatibility-First Migration</a:t>
             </a:r>
           </a:p>
         </p:txBody>
@@ -3717,7 +3701,7 @@
                 </a:solidFill>
                 <a:latin typeface="Aptos"/>
               </a:rPr>
-              <a:t>Preserve the app's DogStatsD metric emission while moving the backend to OpenTelemetry and SigNoz</a:t>
+              <a:t>Keep the app speaking DogStatsD first, then move the platform underneath it</a:t>
             </a:r>
           </a:p>
         </p:txBody>
@@ -3731,7 +3715,7 @@
         <p:spPr>
           <a:xfrm>
             <a:off x="731520" y="1325880"/>
-            <a:ext cx="5303520" cy="4480560"/>
+            <a:ext cx="5303520" cy="4023360"/>
           </a:xfrm>
           <a:prstGeom prst="rect">
             <a:avLst/>
@@ -3756,7 +3740,7 @@
                 </a:solidFill>
                 <a:latin typeface="Aptos"/>
               </a:rPr>
-              <a:t>The application was already emitting StatsD-style metrics through DogStatsD for Datadog.</a:t>
+              <a:t>The app already emitted DogStatsD metrics for Datadog.</a:t>
             </a:r>
           </a:p>
           <a:p>
@@ -3772,7 +3756,7 @@
                 </a:solidFill>
                 <a:latin typeface="Aptos"/>
               </a:rPr>
-              <a:t>We introduced an OpenTelemetry Collector with a StatsD receiver so it could accept the existing metric traffic.</a:t>
+              <a:t>We added an OpenTelemetry Collector with a StatsD receiver to accept that traffic unchanged.</a:t>
             </a:r>
           </a:p>
           <a:p>
@@ -3788,7 +3772,7 @@
                 </a:solidFill>
                 <a:latin typeface="Aptos"/>
               </a:rPr>
-              <a:t>The first migration step was to change the collector target underneath the app rather than rewriting application instrumentation.</a:t>
+              <a:t>The first change was the collector target, not the application code.</a:t>
             </a:r>
           </a:p>
           <a:p>
@@ -3804,7 +3788,7 @@
                 </a:solidFill>
                 <a:latin typeface="Aptos"/>
               </a:rPr>
-              <a:t>That let us validate the SigNoz/OpenTelemetry path first, with minimal initial application risk.</a:t>
+              <a:t>That gave us a low-risk path to validate SigNoz before native OTel SDK cutover.</a:t>
             </a:r>
           </a:p>
         </p:txBody>
@@ -3859,7 +3843,7 @@
                 <a:latin typeface="Aptos"/>
               </a:rPr>
               <a:t>App
-DogStatsD metrics</a:t>
+DogStatsD</a:t>
             </a:r>
           </a:p>
         </p:txBody>
@@ -3968,7 +3952,7 @@
                 </a:solidFill>
                 <a:latin typeface="Aptos"/>
               </a:rPr>
-              <a:t>Datadog path</a:t>
+              <a:t>Original path</a:t>
             </a:r>
           </a:p>
         </p:txBody>
@@ -4022,7 +4006,7 @@
                 </a:solidFill>
                 <a:latin typeface="Aptos"/>
               </a:rPr>
-              <a:t>SigNoz path</a:t>
+              <a:t>New path</a:t>
             </a:r>
           </a:p>
         </p:txBody>
@@ -4131,7 +4115,7 @@
                 </a:solidFill>
                 <a:latin typeface="Aptos"/>
               </a:rPr>
-              <a:t>Key message: the app kept speaking DogStatsD at first; the platform absorbed the migration.</a:t>
+              <a:t>Key message: compatibility came first, application rewrites came later.</a:t>
             </a:r>
           </a:p>
         </p:txBody>
@@ -4196,7 +4180,7 @@
                 </a:solidFill>
                 <a:latin typeface="Aptos Display"/>
               </a:rPr>
-              <a:t>Reference Architecture</a:t>
+              <a:t>Target Architecture</a:t>
             </a:r>
           </a:p>
         </p:txBody>
@@ -4235,7 +4219,7 @@
                 </a:solidFill>
                 <a:latin typeface="Aptos"/>
               </a:rPr>
-              <a:t>Common data flow across both environments</a:t>
+              <a:t>A common telemetry path across migration phases and deployment targets</a:t>
             </a:r>
           </a:p>
         </p:txBody>
@@ -4289,8 +4273,8 @@
                 </a:solidFill>
                 <a:latin typeface="Aptos"/>
               </a:rPr>
-              <a:t>Instrumented services
-(OTel SDK / OTLP)</a:t>
+              <a:t>Apps and checks
+DogStatsD / OTLP / HTTP</a:t>
             </a:r>
           </a:p>
         </p:txBody>
@@ -4345,7 +4329,7 @@
                 <a:latin typeface="Aptos"/>
               </a:rPr>
               <a:t>OTel Collector
-(receivers + processors)</a:t>
+receivers + processors</a:t>
             </a:r>
           </a:p>
         </p:txBody>
@@ -4453,7 +4437,7 @@
                 </a:solidFill>
                 <a:latin typeface="Aptos"/>
               </a:rPr>
-              <a:t>Query Service</a:t>
+              <a:t>Query layer</a:t>
             </a:r>
           </a:p>
         </p:txBody>
@@ -4507,7 +4491,7 @@
                 </a:solidFill>
                 <a:latin typeface="Aptos"/>
               </a:rPr>
-              <a:t>Alerting / Rules</a:t>
+              <a:t>Alerts / rules</a:t>
             </a:r>
           </a:p>
         </p:txBody>
@@ -4562,7 +4546,7 @@
                 <a:latin typeface="Aptos"/>
               </a:rPr>
               <a:t>ClickHouse
-(primary telemetry store)</a:t>
+telemetry store</a:t>
             </a:r>
           </a:p>
         </p:txBody>
@@ -4795,7 +4779,7 @@
                 </a:solidFill>
                 <a:latin typeface="Aptos"/>
               </a:rPr>
-              <a:t>Applications only need to know the collector endpoint; deployment mechanics vary underneath.</a:t>
+              <a:t>Applications and checks converge on the collector layer, even while infrastructure evolves underneath.</a:t>
             </a:r>
           </a:p>
         </p:txBody>
@@ -4834,7 +4818,7 @@
                 </a:solidFill>
                 <a:latin typeface="Aptos"/>
               </a:rPr>
-              <a:t>OpenTelemetry provides a vendor-neutral instrumentation layer.</a:t>
+              <a:t>The collector absorbs protocol differences, routing, and enrichment.</a:t>
             </a:r>
           </a:p>
           <a:p>
@@ -4850,23 +4834,7 @@
                 </a:solidFill>
                 <a:latin typeface="Aptos"/>
               </a:rPr>
-              <a:t>Collectors handle batching, sampling, enrichment, and export.</a:t>
-            </a:r>
-          </a:p>
-          <a:p>
-            <a:pPr algn="l">
-              <a:spcAft>
-                <a:spcPts val="1000"/>
-              </a:spcAft>
-            </a:pPr>
-            <a:r>
-              <a:rPr sz="1500" b="0" i="0">
-                <a:solidFill>
-                  <a:srgbClr val="000000"/>
-                </a:solidFill>
-                <a:latin typeface="Aptos"/>
-              </a:rPr>
-              <a:t>SigNoz turns raw telemetry into searchable traces, metrics, dashboards, and alerts.</a:t>
+              <a:t>SigNoz becomes the shared backend for search, dashboards, and alerting, including creating alerts directly from dashboards.</a:t>
             </a:r>
           </a:p>
         </p:txBody>
@@ -4931,7 +4899,7 @@
                 </a:solidFill>
                 <a:latin typeface="Aptos Display"/>
               </a:rPr>
-              <a:t>Bare Metal Path</a:t>
+              <a:t>Phase 1: Bare Metal Proving Ground</a:t>
             </a:r>
           </a:p>
         </p:txBody>
@@ -4970,7 +4938,7 @@
                 </a:solidFill>
                 <a:latin typeface="Aptos"/>
               </a:rPr>
-              <a:t>Docker Compose deployment managed by custom Ansible playbooks</a:t>
+              <a:t>Dedicated Docker Compose deployment managed by custom Ansible playbooks</a:t>
             </a:r>
           </a:p>
         </p:txBody>
@@ -4984,7 +4952,7 @@
         <p:spPr>
           <a:xfrm>
             <a:off x="731520" y="1417320"/>
-            <a:ext cx="5486400" cy="4663440"/>
+            <a:ext cx="5486400" cy="4114800"/>
           </a:xfrm>
           <a:prstGeom prst="rect">
             <a:avLst/>
@@ -5009,7 +4977,7 @@
                 </a:solidFill>
                 <a:latin typeface="Aptos"/>
               </a:rPr>
-              <a:t>Best fit for dedicated hosts, lower platform abstraction, and direct control of storage, networking, and host tuning.</a:t>
+              <a:t>The first SigNoz and OpenTelemetry deployment ran on a dedicated bare metal instance.</a:t>
             </a:r>
           </a:p>
           <a:p>
@@ -5025,7 +4993,7 @@
                 </a:solidFill>
                 <a:latin typeface="Aptos"/>
               </a:rPr>
-              <a:t>Ansible playbooks prepare hosts, template config, ship secrets, and orchestrate `docker compose` lifecycle.</a:t>
+              <a:t>That environment let us tune receiver, processor, and export behavior before adding Kubernetes complexity.</a:t>
             </a:r>
           </a:p>
           <a:p>
@@ -5041,7 +5009,7 @@
                 </a:solidFill>
                 <a:latin typeface="Aptos"/>
               </a:rPr>
-              <a:t>The first SigNoz/OpenTelemetry deployment was validated on a dedicated bare metal instance before broader rollout.</a:t>
+              <a:t>Ansible handled host preparation, config templating, secrets, and `docker compose` orchestration.</a:t>
             </a:r>
           </a:p>
           <a:p>
@@ -5057,39 +5025,7 @@
                 </a:solidFill>
                 <a:latin typeface="Aptos"/>
               </a:rPr>
-              <a:t>That initial environment was used to tune OpenTelemetry receiver, processor, and export behavior before introducing Kubernetes complexity.</a:t>
-            </a:r>
-          </a:p>
-          <a:p>
-            <a:pPr algn="l">
-              <a:spcAft>
-                <a:spcPts val="1000"/>
-              </a:spcAft>
-            </a:pPr>
-            <a:r>
-              <a:rPr sz="1800" b="0" i="0">
-                <a:solidFill>
-                  <a:srgbClr val="000000"/>
-                </a:solidFill>
-                <a:latin typeface="Aptos"/>
-              </a:rPr>
-              <a:t>Compose runs the observability services as a tightly-coupled stack on each target environment.</a:t>
-            </a:r>
-          </a:p>
-          <a:p>
-            <a:pPr algn="l">
-              <a:spcAft>
-                <a:spcPts val="1000"/>
-              </a:spcAft>
-            </a:pPr>
-            <a:r>
-              <a:rPr sz="1800" b="0" i="0">
-                <a:solidFill>
-                  <a:srgbClr val="000000"/>
-                </a:solidFill>
-                <a:latin typeface="Aptos"/>
-              </a:rPr>
-              <a:t>Persistent volumes, backup policy, firewall rules, and service exposure are managed at the host level.</a:t>
+              <a:t>Bare metal gave direct control over storage, networking, and operational debugging during the proving phase.</a:t>
             </a:r>
           </a:p>
         </p:txBody>
@@ -5453,7 +5389,7 @@
                 </a:solidFill>
                 <a:latin typeface="Aptos"/>
               </a:rPr>
-              <a:t>Typical talking point: bare metal was the proving ground for OTel tuning, with Ansible owning machine state and Compose owning process topology.</a:t>
+              <a:t>Talking point: prove and tune on bare metal first, then carry the validated configuration forward.</a:t>
             </a:r>
           </a:p>
         </p:txBody>
@@ -5518,7 +5454,7 @@
                 </a:solidFill>
                 <a:latin typeface="Aptos Display"/>
               </a:rPr>
-              <a:t>GKE Path</a:t>
+              <a:t>Phase 2: GKE Management Cluster</a:t>
             </a:r>
           </a:p>
         </p:txBody>
@@ -5557,7 +5493,7 @@
                 </a:solidFill>
                 <a:latin typeface="Aptos"/>
               </a:rPr>
-              <a:t>Official SigNoz/OpenTelemetry charts wrapped in custom Pulumi SDKs</a:t>
+              <a:t>Dedicated management cluster using Pulumi and the official SigNoz/OpenTelemetry charts</a:t>
             </a:r>
           </a:p>
         </p:txBody>
@@ -5571,7 +5507,7 @@
         <p:spPr>
           <a:xfrm>
             <a:off x="731520" y="1417320"/>
-            <a:ext cx="5486400" cy="4663440"/>
+            <a:ext cx="5486400" cy="4297680"/>
           </a:xfrm>
           <a:prstGeom prst="rect">
             <a:avLst/>
@@ -5596,7 +5532,7 @@
                 </a:solidFill>
                 <a:latin typeface="Aptos"/>
               </a:rPr>
-              <a:t>After tuning the stack on bare metal, we deployed next into a dedicated GKE management cluster.</a:t>
+              <a:t>Once tuned on bare metal, the stack moved into a dedicated GKE management cluster.</a:t>
             </a:r>
           </a:p>
           <a:p>
@@ -5612,7 +5548,7 @@
                 </a:solidFill>
                 <a:latin typeface="Aptos"/>
               </a:rPr>
-              <a:t>Pulumi defines cluster-facing infrastructure and deploys Helm releases as code.</a:t>
+              <a:t>Pulumi and the official charts made the rollout repeatable and close to upstream defaults.</a:t>
             </a:r>
           </a:p>
           <a:p>
@@ -5628,7 +5564,7 @@
                 </a:solidFill>
                 <a:latin typeface="Aptos"/>
               </a:rPr>
-              <a:t>Official charts keep the deployment aligned with upstream SigNoz/OpenTelemetry packaging and defaults.</a:t>
+              <a:t>The OpenTelemetry Collector ran as a DaemonSet to provide node-local collection across the cluster.</a:t>
             </a:r>
           </a:p>
           <a:p>
@@ -5644,7 +5580,7 @@
                 </a:solidFill>
                 <a:latin typeface="Aptos"/>
               </a:rPr>
-              <a:t>Custom Pulumi SDKs encode company conventions: namespaces, values, networking, storage classes, and environment wiring.</a:t>
+              <a:t>Datadog HTTP checks were converted to OpenTelemetry HTTP checks during this phase.</a:t>
             </a:r>
           </a:p>
           <a:p>
@@ -5660,55 +5596,7 @@
                 </a:solidFill>
                 <a:latin typeface="Aptos"/>
               </a:rPr>
-              <a:t>The OpenTelemetry Collector was deployed as a DaemonSet so each node had local collection capacity across the cluster.</a:t>
-            </a:r>
-          </a:p>
-          <a:p>
-            <a:pPr algn="l">
-              <a:spcAft>
-                <a:spcPts val="1000"/>
-              </a:spcAft>
-            </a:pPr>
-            <a:r>
-              <a:rPr sz="1800" b="0" i="0">
-                <a:solidFill>
-                  <a:srgbClr val="000000"/>
-                </a:solidFill>
-                <a:latin typeface="Aptos"/>
-              </a:rPr>
-              <a:t>We converted existing Datadog HTTP checks to OpenTelemetry-based HTTP checks as part of the management-cluster rollout.</a:t>
-            </a:r>
-          </a:p>
-          <a:p>
-            <a:pPr algn="l">
-              <a:spcAft>
-                <a:spcPts val="1000"/>
-              </a:spcAft>
-            </a:pPr>
-            <a:r>
-              <a:rPr sz="1800" b="0" i="0">
-                <a:solidFill>
-                  <a:srgbClr val="000000"/>
-                </a:solidFill>
-                <a:latin typeface="Aptos"/>
-              </a:rPr>
-              <a:t>Some endpoints required JSON parsing, so we contributed that functionality upstream to SigNoz in a PR.</a:t>
-            </a:r>
-          </a:p>
-          <a:p>
-            <a:pPr algn="l">
-              <a:spcAft>
-                <a:spcPts val="1000"/>
-              </a:spcAft>
-            </a:pPr>
-            <a:r>
-              <a:rPr sz="1800" b="0" i="0">
-                <a:solidFill>
-                  <a:srgbClr val="000000"/>
-                </a:solidFill>
-                <a:latin typeface="Aptos"/>
-              </a:rPr>
-              <a:t>GKE adds managed scheduling, autoscaling, workload isolation, and native Kubernetes operational patterns.</a:t>
+              <a:t>JSON parsing was needed for some endpoints, so that capability was contributed upstream to SigNoz.</a:t>
             </a:r>
           </a:p>
         </p:txBody>
@@ -5762,7 +5650,8 @@
                 </a:solidFill>
                 <a:latin typeface="Aptos"/>
               </a:rPr>
-              <a:t>Pulumi program</a:t>
+              <a:t>Pulumi
++ Helm</a:t>
             </a:r>
           </a:p>
         </p:txBody>
@@ -5816,7 +5705,8 @@
                 </a:solidFill>
                 <a:latin typeface="Aptos"/>
               </a:rPr>
-              <a:t>Helm chart values</a:t>
+              <a:t>Official
+chart values</a:t>
             </a:r>
           </a:p>
         </p:txBody>
@@ -5925,7 +5815,7 @@
                 </a:solidFill>
                 <a:latin typeface="Aptos"/>
               </a:rPr>
-              <a:t>OTel Collector
+              <a:t>Collector
 DaemonSet</a:t>
             </a:r>
           </a:p>
@@ -6070,7 +5960,7 @@
                 </a:solidFill>
                 <a:latin typeface="Aptos"/>
               </a:rPr>
-              <a:t>Typical talking point: after bare-metal tuning, the management cluster validated Kubernetes rollout, node-local collection, and converted health checks.</a:t>
+              <a:t>Talking point: the management cluster turned a tuned stack into a repeatable Kubernetes platform.</a:t>
             </a:r>
           </a:p>
         </p:txBody>
@@ -6135,7 +6025,7 @@
                 </a:solidFill>
                 <a:latin typeface="Aptos Display"/>
               </a:rPr>
-              <a:t>How the Two Models Compare</a:t>
+              <a:t>Rollout Journey</a:t>
             </a:r>
           </a:p>
         </p:txBody>
@@ -6174,446 +6064,481 @@
                 </a:solidFill>
                 <a:latin typeface="Aptos"/>
               </a:rPr>
-              <a:t>Same telemetry contract, different operational responsibilities</a:t>
-            </a:r>
-          </a:p>
-        </p:txBody>
-      </p:sp>
-      <p:graphicFrame>
-        <p:nvGraphicFramePr>
-          <p:cNvPr id="4" name="Table 3"/>
-          <p:cNvGraphicFramePr>
-            <a:graphicFrameLocks noGrp="1"/>
-          </p:cNvGraphicFramePr>
-          <p:nvPr/>
-        </p:nvGraphicFramePr>
-        <p:xfrm>
-          <a:off x="640080" y="1508760"/>
-          <a:ext cx="10972800" cy="4023360"/>
-        </p:xfrm>
-        <a:graphic>
-          <a:graphicData uri="http://schemas.openxmlformats.org/drawingml/2006/table">
-            <a:tbl>
-              <a:tblPr firstRow="1" bandRow="1">
-                <a:tableStyleId>{5C22544A-7EE6-4342-B048-85BDC9FD1C3A}</a:tableStyleId>
-              </a:tblPr>
-              <a:tblGrid>
-                <a:gridCol w="2743200"/>
-                <a:gridCol w="4023360"/>
-                <a:gridCol w="4206240"/>
-              </a:tblGrid>
-              <a:tr h="670560">
-                <a:tc>
-                  <a:txBody>
-                    <a:bodyPr/>
-                    <a:lstStyle/>
-                    <a:p>
-                      <a:r>
-                        <a:rPr sz="1400" b="1">
-                          <a:solidFill>
-                            <a:srgbClr val="FFFFFF"/>
-                          </a:solidFill>
-                          <a:latin typeface="Aptos"/>
-                        </a:rPr>
-                        <a:t>Dimension</a:t>
-                      </a:r>
-                    </a:p>
-                  </a:txBody>
-                  <a:tcPr>
-                    <a:solidFill>
-                      <a:srgbClr val="16213E"/>
-                    </a:solidFill>
-                  </a:tcPr>
-                </a:tc>
-                <a:tc>
-                  <a:txBody>
-                    <a:bodyPr/>
-                    <a:lstStyle/>
-                    <a:p>
-                      <a:r>
-                        <a:rPr sz="1400" b="1">
-                          <a:solidFill>
-                            <a:srgbClr val="FFFFFF"/>
-                          </a:solidFill>
-                          <a:latin typeface="Aptos"/>
-                        </a:rPr>
-                        <a:t>Bare Metal Compose + Ansible</a:t>
-                      </a:r>
-                    </a:p>
-                  </a:txBody>
-                  <a:tcPr>
-                    <a:solidFill>
-                      <a:srgbClr val="16213E"/>
-                    </a:solidFill>
-                  </a:tcPr>
-                </a:tc>
-                <a:tc>
-                  <a:txBody>
-                    <a:bodyPr/>
-                    <a:lstStyle/>
-                    <a:p>
-                      <a:r>
-                        <a:rPr sz="1400" b="1">
-                          <a:solidFill>
-                            <a:srgbClr val="FFFFFF"/>
-                          </a:solidFill>
-                          <a:latin typeface="Aptos"/>
-                        </a:rPr>
-                        <a:t>GKE + Pulumi + Official Charts</a:t>
-                      </a:r>
-                    </a:p>
-                  </a:txBody>
-                  <a:tcPr>
-                    <a:solidFill>
-                      <a:srgbClr val="16213E"/>
-                    </a:solidFill>
-                  </a:tcPr>
-                </a:tc>
-              </a:tr>
-              <a:tr h="670560">
-                <a:tc>
-                  <a:txBody>
-                    <a:bodyPr/>
-                    <a:lstStyle/>
-                    <a:p>
-                      <a:r>
-                        <a:rPr sz="1300" b="0">
-                          <a:solidFill>
-                            <a:srgbClr val="000000"/>
-                          </a:solidFill>
-                          <a:latin typeface="Aptos"/>
-                        </a:rPr>
-                        <a:t>Packaging</a:t>
-                      </a:r>
-                    </a:p>
-                  </a:txBody>
-                  <a:tcPr>
-                    <a:solidFill>
-                      <a:srgbClr val="FFFFFF"/>
-                    </a:solidFill>
-                  </a:tcPr>
-                </a:tc>
-                <a:tc>
-                  <a:txBody>
-                    <a:bodyPr/>
-                    <a:lstStyle/>
-                    <a:p>
-                      <a:r>
-                        <a:rPr sz="1300" b="0">
-                          <a:solidFill>
-                            <a:srgbClr val="000000"/>
-                          </a:solidFill>
-                          <a:latin typeface="Aptos"/>
-                        </a:rPr>
-                        <a:t>Compose services on managed hosts</a:t>
-                      </a:r>
-                    </a:p>
-                  </a:txBody>
-                  <a:tcPr>
-                    <a:solidFill>
-                      <a:srgbClr val="FFFFFF"/>
-                    </a:solidFill>
-                  </a:tcPr>
-                </a:tc>
-                <a:tc>
-                  <a:txBody>
-                    <a:bodyPr/>
-                    <a:lstStyle/>
-                    <a:p>
-                      <a:r>
-                        <a:rPr sz="1300" b="0">
-                          <a:solidFill>
-                            <a:srgbClr val="000000"/>
-                          </a:solidFill>
-                          <a:latin typeface="Aptos"/>
-                        </a:rPr>
-                        <a:t>Helm releases on Kubernetes</a:t>
-                      </a:r>
-                    </a:p>
-                  </a:txBody>
-                  <a:tcPr>
-                    <a:solidFill>
-                      <a:srgbClr val="FFFFFF"/>
-                    </a:solidFill>
-                  </a:tcPr>
-                </a:tc>
-              </a:tr>
-              <a:tr h="670560">
-                <a:tc>
-                  <a:txBody>
-                    <a:bodyPr/>
-                    <a:lstStyle/>
-                    <a:p>
-                      <a:r>
-                        <a:rPr sz="1300" b="0">
-                          <a:solidFill>
-                            <a:srgbClr val="000000"/>
-                          </a:solidFill>
-                          <a:latin typeface="Aptos"/>
-                        </a:rPr>
-                        <a:t>Automation</a:t>
-                      </a:r>
-                    </a:p>
-                  </a:txBody>
-                  <a:tcPr>
-                    <a:solidFill>
-                      <a:srgbClr val="ECF2F8"/>
-                    </a:solidFill>
-                  </a:tcPr>
-                </a:tc>
-                <a:tc>
-                  <a:txBody>
-                    <a:bodyPr/>
-                    <a:lstStyle/>
-                    <a:p>
-                      <a:r>
-                        <a:rPr sz="1300" b="0">
-                          <a:solidFill>
-                            <a:srgbClr val="000000"/>
-                          </a:solidFill>
-                          <a:latin typeface="Aptos"/>
-                        </a:rPr>
-                        <a:t>Playbooks configure machines and run stack lifecycle</a:t>
-                      </a:r>
-                    </a:p>
-                  </a:txBody>
-                  <a:tcPr>
-                    <a:solidFill>
-                      <a:srgbClr val="ECF2F8"/>
-                    </a:solidFill>
-                  </a:tcPr>
-                </a:tc>
-                <a:tc>
-                  <a:txBody>
-                    <a:bodyPr/>
-                    <a:lstStyle/>
-                    <a:p>
-                      <a:r>
-                        <a:rPr sz="1300" b="0">
-                          <a:solidFill>
-                            <a:srgbClr val="000000"/>
-                          </a:solidFill>
-                          <a:latin typeface="Aptos"/>
-                        </a:rPr>
-                        <a:t>Pulumi programs provision and update cluster resources</a:t>
-                      </a:r>
-                    </a:p>
-                  </a:txBody>
-                  <a:tcPr>
-                    <a:solidFill>
-                      <a:srgbClr val="ECF2F8"/>
-                    </a:solidFill>
-                  </a:tcPr>
-                </a:tc>
-              </a:tr>
-              <a:tr h="670560">
-                <a:tc>
-                  <a:txBody>
-                    <a:bodyPr/>
-                    <a:lstStyle/>
-                    <a:p>
-                      <a:r>
-                        <a:rPr sz="1300" b="0">
-                          <a:solidFill>
-                            <a:srgbClr val="000000"/>
-                          </a:solidFill>
-                          <a:latin typeface="Aptos"/>
-                        </a:rPr>
-                        <a:t>Scaling</a:t>
-                      </a:r>
-                    </a:p>
-                  </a:txBody>
-                  <a:tcPr>
-                    <a:solidFill>
-                      <a:srgbClr val="FFFFFF"/>
-                    </a:solidFill>
-                  </a:tcPr>
-                </a:tc>
-                <a:tc>
-                  <a:txBody>
-                    <a:bodyPr/>
-                    <a:lstStyle/>
-                    <a:p>
-                      <a:r>
-                        <a:rPr sz="1300" b="0">
-                          <a:solidFill>
-                            <a:srgbClr val="000000"/>
-                          </a:solidFill>
-                          <a:latin typeface="Aptos"/>
-                        </a:rPr>
-                        <a:t>Vertical or host-based scaling</a:t>
-                      </a:r>
-                    </a:p>
-                  </a:txBody>
-                  <a:tcPr>
-                    <a:solidFill>
-                      <a:srgbClr val="FFFFFF"/>
-                    </a:solidFill>
-                  </a:tcPr>
-                </a:tc>
-                <a:tc>
-                  <a:txBody>
-                    <a:bodyPr/>
-                    <a:lstStyle/>
-                    <a:p>
-                      <a:r>
-                        <a:rPr sz="1300" b="0">
-                          <a:solidFill>
-                            <a:srgbClr val="000000"/>
-                          </a:solidFill>
-                          <a:latin typeface="Aptos"/>
-                        </a:rPr>
-                        <a:t>Horizontal pod and cluster scaling patterns</a:t>
-                      </a:r>
-                    </a:p>
-                  </a:txBody>
-                  <a:tcPr>
-                    <a:solidFill>
-                      <a:srgbClr val="FFFFFF"/>
-                    </a:solidFill>
-                  </a:tcPr>
-                </a:tc>
-              </a:tr>
-              <a:tr h="670560">
-                <a:tc>
-                  <a:txBody>
-                    <a:bodyPr/>
-                    <a:lstStyle/>
-                    <a:p>
-                      <a:r>
-                        <a:rPr sz="1300" b="0">
-                          <a:solidFill>
-                            <a:srgbClr val="000000"/>
-                          </a:solidFill>
-                          <a:latin typeface="Aptos"/>
-                        </a:rPr>
-                        <a:t>Operations</a:t>
-                      </a:r>
-                    </a:p>
-                  </a:txBody>
-                  <a:tcPr>
-                    <a:solidFill>
-                      <a:srgbClr val="ECF2F8"/>
-                    </a:solidFill>
-                  </a:tcPr>
-                </a:tc>
-                <a:tc>
-                  <a:txBody>
-                    <a:bodyPr/>
-                    <a:lstStyle/>
-                    <a:p>
-                      <a:r>
-                        <a:rPr sz="1300" b="0">
-                          <a:solidFill>
-                            <a:srgbClr val="000000"/>
-                          </a:solidFill>
-                          <a:latin typeface="Aptos"/>
-                        </a:rPr>
-                        <a:t>Host tuning, ports, volumes, backups</a:t>
-                      </a:r>
-                    </a:p>
-                  </a:txBody>
-                  <a:tcPr>
-                    <a:solidFill>
-                      <a:srgbClr val="ECF2F8"/>
-                    </a:solidFill>
-                  </a:tcPr>
-                </a:tc>
-                <a:tc>
-                  <a:txBody>
-                    <a:bodyPr/>
-                    <a:lstStyle/>
-                    <a:p>
-                      <a:r>
-                        <a:rPr sz="1300" b="0">
-                          <a:solidFill>
-                            <a:srgbClr val="000000"/>
-                          </a:solidFill>
-                          <a:latin typeface="Aptos"/>
-                        </a:rPr>
-                        <a:t>Namespaces, ingress, storage classes, RBAC, autoscaling</a:t>
-                      </a:r>
-                    </a:p>
-                  </a:txBody>
-                  <a:tcPr>
-                    <a:solidFill>
-                      <a:srgbClr val="ECF2F8"/>
-                    </a:solidFill>
-                  </a:tcPr>
-                </a:tc>
-              </a:tr>
-              <a:tr h="670560">
-                <a:tc>
-                  <a:txBody>
-                    <a:bodyPr/>
-                    <a:lstStyle/>
-                    <a:p>
-                      <a:r>
-                        <a:rPr sz="1300" b="0">
-                          <a:solidFill>
-                            <a:srgbClr val="000000"/>
-                          </a:solidFill>
-                          <a:latin typeface="Aptos"/>
-                        </a:rPr>
-                        <a:t>Use case</a:t>
-                      </a:r>
-                    </a:p>
-                  </a:txBody>
-                  <a:tcPr>
-                    <a:solidFill>
-                      <a:srgbClr val="FFFFFF"/>
-                    </a:solidFill>
-                  </a:tcPr>
-                </a:tc>
-                <a:tc>
-                  <a:txBody>
-                    <a:bodyPr/>
-                    <a:lstStyle/>
-                    <a:p>
-                      <a:r>
-                        <a:rPr sz="1300" b="0">
-                          <a:solidFill>
-                            <a:srgbClr val="000000"/>
-                          </a:solidFill>
-                          <a:latin typeface="Aptos"/>
-                        </a:rPr>
-                        <a:t>Stable dedicated environments with direct infra control</a:t>
-                      </a:r>
-                    </a:p>
-                  </a:txBody>
-                  <a:tcPr>
-                    <a:solidFill>
-                      <a:srgbClr val="FFFFFF"/>
-                    </a:solidFill>
-                  </a:tcPr>
-                </a:tc>
-                <a:tc>
-                  <a:txBody>
-                    <a:bodyPr/>
-                    <a:lstStyle/>
-                    <a:p>
-                      <a:r>
-                        <a:rPr sz="1300" b="0">
-                          <a:solidFill>
-                            <a:srgbClr val="000000"/>
-                          </a:solidFill>
-                          <a:latin typeface="Aptos"/>
-                        </a:rPr>
-                        <a:t>Platformized environments needing repeatable multi-cluster rollout</a:t>
-                      </a:r>
-                    </a:p>
-                  </a:txBody>
-                  <a:tcPr>
-                    <a:solidFill>
-                      <a:srgbClr val="FFFFFF"/>
-                    </a:solidFill>
-                  </a:tcPr>
-                </a:tc>
-              </a:tr>
-            </a:tbl>
-          </a:graphicData>
-        </a:graphic>
-      </p:graphicFrame>
+              <a:t>The migration progressed in controlled phases rather than one big cutover</a:t>
+            </a:r>
+          </a:p>
+        </p:txBody>
+      </p:sp>
+      <p:sp>
+        <p:nvSpPr>
+          <p:cNvPr id="4" name="Rounded Rectangle 3"/>
+          <p:cNvSpPr/>
+          <p:nvPr/>
+        </p:nvSpPr>
+        <p:spPr>
+          <a:xfrm>
+            <a:off x="548640" y="1828800"/>
+            <a:ext cx="2011680" cy="914400"/>
+          </a:xfrm>
+          <a:prstGeom prst="roundRect">
+            <a:avLst/>
+          </a:prstGeom>
+          <a:solidFill>
+            <a:srgbClr val="ECF2F8"/>
+          </a:solidFill>
+          <a:ln w="15875">
+            <a:solidFill>
+              <a:srgbClr val="2B6CB0"/>
+            </a:solidFill>
+          </a:ln>
+        </p:spPr>
+        <p:style>
+          <a:lnRef idx="1">
+            <a:schemeClr val="accent1"/>
+          </a:lnRef>
+          <a:fillRef idx="3">
+            <a:schemeClr val="accent1"/>
+          </a:fillRef>
+          <a:effectRef idx="2">
+            <a:schemeClr val="accent1"/>
+          </a:effectRef>
+          <a:fontRef idx="minor">
+            <a:schemeClr val="lt1"/>
+          </a:fontRef>
+        </p:style>
+        <p:txBody>
+          <a:bodyPr rtlCol="0" anchor="ctr"/>
+          <a:lstStyle/>
+          <a:p>
+            <a:pPr algn="ctr"/>
+            <a:r>
+              <a:rPr sz="1600" b="1" i="0">
+                <a:solidFill>
+                  <a:srgbClr val="16213E"/>
+                </a:solidFill>
+                <a:latin typeface="Aptos"/>
+              </a:rPr>
+              <a:t>1. Datadog
+DogStatsD + checks</a:t>
+            </a:r>
+          </a:p>
+        </p:txBody>
+      </p:sp>
+      <p:sp>
+        <p:nvSpPr>
+          <p:cNvPr id="5" name="Rounded Rectangle 4"/>
+          <p:cNvSpPr/>
+          <p:nvPr/>
+        </p:nvSpPr>
+        <p:spPr>
+          <a:xfrm>
+            <a:off x="2743200" y="1828800"/>
+            <a:ext cx="2011680" cy="914400"/>
+          </a:xfrm>
+          <a:prstGeom prst="roundRect">
+            <a:avLst/>
+          </a:prstGeom>
+          <a:solidFill>
+            <a:srgbClr val="E6F5EA"/>
+          </a:solidFill>
+          <a:ln w="15875">
+            <a:solidFill>
+              <a:srgbClr val="2B6CB0"/>
+            </a:solidFill>
+          </a:ln>
+        </p:spPr>
+        <p:style>
+          <a:lnRef idx="1">
+            <a:schemeClr val="accent1"/>
+          </a:lnRef>
+          <a:fillRef idx="3">
+            <a:schemeClr val="accent1"/>
+          </a:fillRef>
+          <a:effectRef idx="2">
+            <a:schemeClr val="accent1"/>
+          </a:effectRef>
+          <a:fontRef idx="minor">
+            <a:schemeClr val="lt1"/>
+          </a:fontRef>
+        </p:style>
+        <p:txBody>
+          <a:bodyPr rtlCol="0" anchor="ctr"/>
+          <a:lstStyle/>
+          <a:p>
+            <a:pPr algn="ctr"/>
+            <a:r>
+              <a:rPr sz="1600" b="1" i="0">
+                <a:solidFill>
+                  <a:srgbClr val="16213E"/>
+                </a:solidFill>
+                <a:latin typeface="Aptos"/>
+              </a:rPr>
+              <a:t>2. Collector shim
+StatsD receiver</a:t>
+            </a:r>
+          </a:p>
+        </p:txBody>
+      </p:sp>
+      <p:sp>
+        <p:nvSpPr>
+          <p:cNvPr id="6" name="Rounded Rectangle 5"/>
+          <p:cNvSpPr/>
+          <p:nvPr/>
+        </p:nvSpPr>
+        <p:spPr>
+          <a:xfrm>
+            <a:off x="4937760" y="1828800"/>
+            <a:ext cx="2011680" cy="914400"/>
+          </a:xfrm>
+          <a:prstGeom prst="roundRect">
+            <a:avLst/>
+          </a:prstGeom>
+          <a:solidFill>
+            <a:srgbClr val="FDEDDE"/>
+          </a:solidFill>
+          <a:ln w="15875">
+            <a:solidFill>
+              <a:srgbClr val="2B6CB0"/>
+            </a:solidFill>
+          </a:ln>
+        </p:spPr>
+        <p:style>
+          <a:lnRef idx="1">
+            <a:schemeClr val="accent1"/>
+          </a:lnRef>
+          <a:fillRef idx="3">
+            <a:schemeClr val="accent1"/>
+          </a:fillRef>
+          <a:effectRef idx="2">
+            <a:schemeClr val="accent1"/>
+          </a:effectRef>
+          <a:fontRef idx="minor">
+            <a:schemeClr val="lt1"/>
+          </a:fontRef>
+        </p:style>
+        <p:txBody>
+          <a:bodyPr rtlCol="0" anchor="ctr"/>
+          <a:lstStyle/>
+          <a:p>
+            <a:pPr algn="ctr"/>
+            <a:r>
+              <a:rPr sz="1600" b="1" i="0">
+                <a:solidFill>
+                  <a:srgbClr val="16213E"/>
+                </a:solidFill>
+                <a:latin typeface="Aptos"/>
+              </a:rPr>
+              <a:t>3. Bare metal
+tune and validate</a:t>
+            </a:r>
+          </a:p>
+        </p:txBody>
+      </p:sp>
+      <p:sp>
+        <p:nvSpPr>
+          <p:cNvPr id="7" name="Rounded Rectangle 6"/>
+          <p:cNvSpPr/>
+          <p:nvPr/>
+        </p:nvSpPr>
+        <p:spPr>
+          <a:xfrm>
+            <a:off x="7132320" y="1828800"/>
+            <a:ext cx="2011680" cy="914400"/>
+          </a:xfrm>
+          <a:prstGeom prst="roundRect">
+            <a:avLst/>
+          </a:prstGeom>
+          <a:solidFill>
+            <a:srgbClr val="ECF2F8"/>
+          </a:solidFill>
+          <a:ln w="15875">
+            <a:solidFill>
+              <a:srgbClr val="2B6CB0"/>
+            </a:solidFill>
+          </a:ln>
+        </p:spPr>
+        <p:style>
+          <a:lnRef idx="1">
+            <a:schemeClr val="accent1"/>
+          </a:lnRef>
+          <a:fillRef idx="3">
+            <a:schemeClr val="accent1"/>
+          </a:fillRef>
+          <a:effectRef idx="2">
+            <a:schemeClr val="accent1"/>
+          </a:effectRef>
+          <a:fontRef idx="minor">
+            <a:schemeClr val="lt1"/>
+          </a:fontRef>
+        </p:style>
+        <p:txBody>
+          <a:bodyPr rtlCol="0" anchor="ctr"/>
+          <a:lstStyle/>
+          <a:p>
+            <a:pPr algn="ctr"/>
+            <a:r>
+              <a:rPr sz="1600" b="1" i="0">
+                <a:solidFill>
+                  <a:srgbClr val="16213E"/>
+                </a:solidFill>
+                <a:latin typeface="Aptos"/>
+              </a:rPr>
+              <a:t>4. GKE mgmt
+cluster rollout</a:t>
+            </a:r>
+          </a:p>
+        </p:txBody>
+      </p:sp>
+      <p:sp>
+        <p:nvSpPr>
+          <p:cNvPr id="8" name="Rounded Rectangle 7"/>
+          <p:cNvSpPr/>
+          <p:nvPr/>
+        </p:nvSpPr>
+        <p:spPr>
+          <a:xfrm>
+            <a:off x="9326880" y="1828800"/>
+            <a:ext cx="2011680" cy="914400"/>
+          </a:xfrm>
+          <a:prstGeom prst="roundRect">
+            <a:avLst/>
+          </a:prstGeom>
+          <a:solidFill>
+            <a:srgbClr val="E6F5EA"/>
+          </a:solidFill>
+          <a:ln w="15875">
+            <a:solidFill>
+              <a:srgbClr val="2B6CB0"/>
+            </a:solidFill>
+          </a:ln>
+        </p:spPr>
+        <p:style>
+          <a:lnRef idx="1">
+            <a:schemeClr val="accent1"/>
+          </a:lnRef>
+          <a:fillRef idx="3">
+            <a:schemeClr val="accent1"/>
+          </a:fillRef>
+          <a:effectRef idx="2">
+            <a:schemeClr val="accent1"/>
+          </a:effectRef>
+          <a:fontRef idx="minor">
+            <a:schemeClr val="lt1"/>
+          </a:fontRef>
+        </p:style>
+        <p:txBody>
+          <a:bodyPr rtlCol="0" anchor="ctr"/>
+          <a:lstStyle/>
+          <a:p>
+            <a:pPr algn="ctr"/>
+            <a:r>
+              <a:rPr sz="1600" b="1" i="0">
+                <a:solidFill>
+                  <a:srgbClr val="16213E"/>
+                </a:solidFill>
+                <a:latin typeface="Aptos"/>
+              </a:rPr>
+              <a:t>5. Native OTel
+service pilot</a:t>
+            </a:r>
+          </a:p>
+        </p:txBody>
+      </p:sp>
+      <p:cxnSp>
+        <p:nvCxnSpPr>
+          <p:cNvPr id="9" name="Connector 8"/>
+          <p:cNvCxnSpPr/>
+          <p:nvPr/>
+        </p:nvCxnSpPr>
+        <p:spPr>
+          <a:xfrm>
+            <a:off x="2560320" y="2286000"/>
+            <a:ext cx="182880" cy="0"/>
+          </a:xfrm>
+          <a:prstGeom prst="line">
+            <a:avLst/>
+          </a:prstGeom>
+          <a:ln w="25400">
+            <a:solidFill>
+              <a:srgbClr val="4F5D75"/>
+            </a:solidFill>
+          </a:ln>
+        </p:spPr>
+        <p:style>
+          <a:lnRef idx="2">
+            <a:schemeClr val="accent1"/>
+          </a:lnRef>
+          <a:fillRef idx="0">
+            <a:schemeClr val="accent1"/>
+          </a:fillRef>
+          <a:effectRef idx="1">
+            <a:schemeClr val="accent1"/>
+          </a:effectRef>
+          <a:fontRef idx="minor">
+            <a:schemeClr val="tx1"/>
+          </a:fontRef>
+        </p:style>
+      </p:cxnSp>
+      <p:cxnSp>
+        <p:nvCxnSpPr>
+          <p:cNvPr id="10" name="Connector 9"/>
+          <p:cNvCxnSpPr/>
+          <p:nvPr/>
+        </p:nvCxnSpPr>
+        <p:spPr>
+          <a:xfrm>
+            <a:off x="4754880" y="2286000"/>
+            <a:ext cx="182880" cy="0"/>
+          </a:xfrm>
+          <a:prstGeom prst="line">
+            <a:avLst/>
+          </a:prstGeom>
+          <a:ln w="25400">
+            <a:solidFill>
+              <a:srgbClr val="4F5D75"/>
+            </a:solidFill>
+          </a:ln>
+        </p:spPr>
+        <p:style>
+          <a:lnRef idx="2">
+            <a:schemeClr val="accent1"/>
+          </a:lnRef>
+          <a:fillRef idx="0">
+            <a:schemeClr val="accent1"/>
+          </a:fillRef>
+          <a:effectRef idx="1">
+            <a:schemeClr val="accent1"/>
+          </a:effectRef>
+          <a:fontRef idx="minor">
+            <a:schemeClr val="tx1"/>
+          </a:fontRef>
+        </p:style>
+      </p:cxnSp>
+      <p:cxnSp>
+        <p:nvCxnSpPr>
+          <p:cNvPr id="11" name="Connector 10"/>
+          <p:cNvCxnSpPr/>
+          <p:nvPr/>
+        </p:nvCxnSpPr>
+        <p:spPr>
+          <a:xfrm>
+            <a:off x="6949440" y="2286000"/>
+            <a:ext cx="182880" cy="0"/>
+          </a:xfrm>
+          <a:prstGeom prst="line">
+            <a:avLst/>
+          </a:prstGeom>
+          <a:ln w="25400">
+            <a:solidFill>
+              <a:srgbClr val="4F5D75"/>
+            </a:solidFill>
+          </a:ln>
+        </p:spPr>
+        <p:style>
+          <a:lnRef idx="2">
+            <a:schemeClr val="accent1"/>
+          </a:lnRef>
+          <a:fillRef idx="0">
+            <a:schemeClr val="accent1"/>
+          </a:fillRef>
+          <a:effectRef idx="1">
+            <a:schemeClr val="accent1"/>
+          </a:effectRef>
+          <a:fontRef idx="minor">
+            <a:schemeClr val="tx1"/>
+          </a:fontRef>
+        </p:style>
+      </p:cxnSp>
+      <p:cxnSp>
+        <p:nvCxnSpPr>
+          <p:cNvPr id="12" name="Connector 11"/>
+          <p:cNvCxnSpPr/>
+          <p:nvPr/>
+        </p:nvCxnSpPr>
+        <p:spPr>
+          <a:xfrm>
+            <a:off x="9144000" y="2286000"/>
+            <a:ext cx="182880" cy="0"/>
+          </a:xfrm>
+          <a:prstGeom prst="line">
+            <a:avLst/>
+          </a:prstGeom>
+          <a:ln w="25400">
+            <a:solidFill>
+              <a:srgbClr val="4F5D75"/>
+            </a:solidFill>
+          </a:ln>
+        </p:spPr>
+        <p:style>
+          <a:lnRef idx="2">
+            <a:schemeClr val="accent1"/>
+          </a:lnRef>
+          <a:fillRef idx="0">
+            <a:schemeClr val="accent1"/>
+          </a:fillRef>
+          <a:effectRef idx="1">
+            <a:schemeClr val="accent1"/>
+          </a:effectRef>
+          <a:fontRef idx="minor">
+            <a:schemeClr val="tx1"/>
+          </a:fontRef>
+        </p:style>
+      </p:cxnSp>
+      <p:sp>
+        <p:nvSpPr>
+          <p:cNvPr id="13" name="TextBox 12"/>
+          <p:cNvSpPr txBox="1"/>
+          <p:nvPr/>
+        </p:nvSpPr>
+        <p:spPr>
+          <a:xfrm>
+            <a:off x="822960" y="4023360"/>
+            <a:ext cx="10515600" cy="1280160"/>
+          </a:xfrm>
+          <a:prstGeom prst="rect">
+            <a:avLst/>
+          </a:prstGeom>
+          <a:noFill/>
+        </p:spPr>
+        <p:txBody>
+          <a:bodyPr wrap="square">
+            <a:spAutoFit/>
+          </a:bodyPr>
+          <a:lstStyle/>
+          <a:p>
+            <a:pPr algn="l">
+              <a:spcAft>
+                <a:spcPts val="1000"/>
+              </a:spcAft>
+            </a:pPr>
+            <a:r>
+              <a:rPr sz="1800" b="0" i="0">
+                <a:solidFill>
+                  <a:srgbClr val="000000"/>
+                </a:solidFill>
+                <a:latin typeface="Aptos"/>
+              </a:rPr>
+              <a:t>Each phase reduced risk while increasing confidence in the new platform.</a:t>
+            </a:r>
+          </a:p>
+          <a:p>
+            <a:pPr algn="l">
+              <a:spcAft>
+                <a:spcPts val="1000"/>
+              </a:spcAft>
+            </a:pPr>
+            <a:r>
+              <a:rPr sz="1800" b="0" i="0">
+                <a:solidFill>
+                  <a:srgbClr val="000000"/>
+                </a:solidFill>
+                <a:latin typeface="Aptos"/>
+              </a:rPr>
+              <a:t>Platform compatibility came first; native OpenTelemetry instrumentation came later.</a:t>
+            </a:r>
+          </a:p>
+        </p:txBody>
+      </p:sp>
     </p:spTree>
   </p:cSld>
   <p:clrMapOvr>
@@ -6674,7 +6599,7 @@
                 </a:solidFill>
                 <a:latin typeface="Aptos Display"/>
               </a:rPr>
-              <a:t>Operational Workflow</a:t>
+              <a:t>Steady-State Operating Model</a:t>
             </a:r>
           </a:p>
         </p:txBody>
@@ -6713,7 +6638,7 @@
                 </a:solidFill>
                 <a:latin typeface="Aptos"/>
               </a:rPr>
-              <a:t>From telemetry emission to troubleshooting and alerting</a:t>
+              <a:t>What the final observability path looks like once the migration is complete</a:t>
             </a:r>
           </a:p>
         </p:txBody>
@@ -6768,7 +6693,7 @@
                 <a:latin typeface="Aptos"/>
               </a:rPr>
               <a:t>1. Apps emit
-DogStatsD / OTLP</a:t>
+metrics / logs / traces</a:t>
             </a:r>
           </a:p>
         </p:txBody>
@@ -6823,7 +6748,7 @@
                 <a:latin typeface="Aptos"/>
               </a:rPr>
               <a:t>2. Collectors receive,
-process, and export</a:t>
+enrich, and route</a:t>
             </a:r>
           </a:p>
         </p:txBody>
@@ -6878,7 +6803,7 @@
                 <a:latin typeface="Aptos"/>
               </a:rPr>
               <a:t>3. SigNoz stores and
-correlates telemetry</a:t>
+correlates signals</a:t>
             </a:r>
           </a:p>
         </p:txBody>
@@ -6987,8 +6912,8 @@
                 </a:solidFill>
                 <a:latin typeface="Aptos"/>
               </a:rPr>
-              <a:t>5. Alert on symptoms
-and drill into cause</a:t>
+              <a:t>5. Build alerts
+from dashboards</a:t>
             </a:r>
           </a:p>
         </p:txBody>
@@ -7167,7 +7092,7 @@
                 </a:solidFill>
                 <a:latin typeface="Aptos"/>
               </a:rPr>
-              <a:t>The first migration preserved existing DogStatsD metric emission and moved translation into the collector layer.</a:t>
+              <a:t>The collector layer hides protocol and routing details from application teams.</a:t>
             </a:r>
           </a:p>
           <a:p>
@@ -7183,7 +7108,7 @@
                 </a:solidFill>
                 <a:latin typeface="Aptos"/>
               </a:rPr>
-              <a:t>Once the platform path was ready, one service was migrated to the OpenTelemetry SDK for logs and metrics so it was ready for switchover.</a:t>
+              <a:t>Native OTel SDK rollout can happen service by service once the platform is ready.</a:t>
             </a:r>
           </a:p>
           <a:p>
@@ -7199,7 +7124,7 @@
                 </a:solidFill>
                 <a:latin typeface="Aptos"/>
               </a:rPr>
-              <a:t>After that compatibility step, the application-facing workflow stayed stable even as the backend moved to SigNoz.</a:t>
+              <a:t>Teams can turn dashboard views into alerts, then drill from the alert back into traces, logs, and metrics.</a:t>
             </a:r>
           </a:p>
         </p:txBody>
@@ -7264,7 +7189,7 @@
                 </a:solidFill>
                 <a:latin typeface="Aptos Display"/>
               </a:rPr>
-              <a:t>Key Design Trade-Offs</a:t>
+              <a:t>Key Presentation Takeaways</a:t>
             </a:r>
           </a:p>
         </p:txBody>
@@ -7303,7 +7228,7 @@
                 </a:solidFill>
                 <a:latin typeface="Aptos"/>
               </a:rPr>
-              <a:t>How to explain why both deployment patterns exist</a:t>
+              <a:t>The points that matter most to stakeholders and engineering teams</a:t>
             </a:r>
           </a:p>
         </p:txBody>
@@ -7317,7 +7242,7 @@
         <p:spPr>
           <a:xfrm>
             <a:off x="777240" y="1417320"/>
-            <a:ext cx="10698480" cy="4206240"/>
+            <a:ext cx="10698480" cy="4389120"/>
           </a:xfrm>
           <a:prstGeom prst="rect">
             <a:avLst/>
@@ -7342,7 +7267,7 @@
                 </a:solidFill>
                 <a:latin typeface="Aptos"/>
               </a:rPr>
-              <a:t>Bare metal gives stronger control over hosts, storage layout, and performance tuning, but more day-2 operations stay manual or host-centric.</a:t>
+              <a:t>We avoided a high-risk rewrite by preserving DogStatsD compatibility first.</a:t>
             </a:r>
           </a:p>
           <a:p>
@@ -7358,7 +7283,7 @@
                 </a:solidFill>
                 <a:latin typeface="Aptos"/>
               </a:rPr>
-              <a:t>Starting on a dedicated bare metal instance reduced migration risk and gave a contained environment to validate and tune the new telemetry pipeline.</a:t>
+              <a:t>Bare metal was the right place to validate and tune OpenTelemetry before scaling the rollout.</a:t>
             </a:r>
           </a:p>
           <a:p>
@@ -7374,7 +7299,7 @@
                 </a:solidFill>
                 <a:latin typeface="Aptos"/>
               </a:rPr>
-              <a:t>GKE raises the abstraction level: easier rollout standardization, easier scaling, and cleaner multi-environment promotion patterns.</a:t>
+              <a:t>The GKE management cluster made the platform repeatable with Pulumi, official charts, and a collector DaemonSet.</a:t>
             </a:r>
           </a:p>
           <a:p>
@@ -7390,7 +7315,7 @@
                 </a:solidFill>
                 <a:latin typeface="Aptos"/>
               </a:rPr>
-              <a:t>Moving next to a dedicated GKE management cluster let the team apply those tuning decisions in Kubernetes while using a DaemonSet collector model for cluster-wide coverage.</a:t>
+              <a:t>Migrating HTTP checks exposed a product gap, and that gap was closed with an upstream contribution to SigNoz.</a:t>
             </a:r>
           </a:p>
           <a:p>
@@ -7406,7 +7331,7 @@
                 </a:solidFill>
                 <a:latin typeface="Aptos"/>
               </a:rPr>
-              <a:t>Converting Datadog HTTP checks to OpenTelemetry checks exposed a gap for JSON endpoint parsing, which was addressed by contributing upstream to SigNoz.</a:t>
+              <a:t>The new platform made it possible to create alerts directly from dashboards instead of managing those views separately.</a:t>
             </a:r>
           </a:p>
           <a:p>
@@ -7422,39 +7347,7 @@
                 </a:solidFill>
                 <a:latin typeface="Aptos"/>
               </a:rPr>
-              <a:t>Using official charts on GKE reduces drift from upstream, while custom Pulumi SDKs keep organizational standards reusable.</a:t>
-            </a:r>
-          </a:p>
-          <a:p>
-            <a:pPr algn="l">
-              <a:spcAft>
-                <a:spcPts val="1000"/>
-              </a:spcAft>
-            </a:pPr>
-            <a:r>
-              <a:rPr sz="1900" b="0" i="0">
-                <a:solidFill>
-                  <a:srgbClr val="000000"/>
-                </a:solidFill>
-                <a:latin typeface="Aptos"/>
-              </a:rPr>
-              <a:t>Piloting one service on the OpenTelemetry SDK for logs and metrics created a low-risk path toward eventual switchover.</a:t>
-            </a:r>
-          </a:p>
-          <a:p>
-            <a:pPr algn="l">
-              <a:spcAft>
-                <a:spcPts val="1000"/>
-              </a:spcAft>
-            </a:pPr>
-            <a:r>
-              <a:rPr sz="1900" b="0" i="0">
-                <a:solidFill>
-                  <a:srgbClr val="000000"/>
-                </a:solidFill>
-                <a:latin typeface="Aptos"/>
-              </a:rPr>
-              <a:t>Using custom Ansible playbooks for Compose keeps legacy or non-Kubernetes environments observable without changing the application instrumentation model.</a:t>
+              <a:t>A pilot service on the OpenTelemetry SDK created a controlled path to final switchover.</a:t>
             </a:r>
           </a:p>
         </p:txBody>

--- a/opentelemetry-signoz-observability-stack.pptx
+++ b/opentelemetry-signoz-observability-stack.pptx
@@ -4504,14 +4504,14 @@
         </p:nvSpPr>
         <p:spPr>
           <a:xfrm>
-            <a:off x="7680960" y="1828800"/>
-            <a:ext cx="2011680" cy="914400"/>
+            <a:off x="5394960" y="4251960"/>
+            <a:ext cx="1828800" cy="822960"/>
           </a:xfrm>
           <a:prstGeom prst="roundRect">
             <a:avLst/>
           </a:prstGeom>
           <a:solidFill>
-            <a:srgbClr val="ECF2F8"/>
+            <a:srgbClr val="FDEDDE"/>
           </a:solidFill>
           <a:ln w="15875">
             <a:solidFill>
@@ -4539,7 +4539,7 @@
           <a:p>
             <a:pPr algn="ctr"/>
             <a:r>
-              <a:rPr sz="1700" b="1" i="0">
+              <a:rPr sz="1600" b="1" i="0">
                 <a:solidFill>
                   <a:srgbClr val="16213E"/>
                 </a:solidFill>
@@ -4559,7 +4559,7 @@
         </p:nvSpPr>
         <p:spPr>
           <a:xfrm>
-            <a:off x="10058400" y="1828800"/>
+            <a:off x="9418320" y="1828800"/>
             <a:ext cx="1280160" cy="914400"/>
           </a:xfrm>
           <a:prstGeom prst="roundRect">
@@ -4684,7 +4684,7 @@
         <p:spPr>
           <a:xfrm>
             <a:off x="7223760" y="2286000"/>
-            <a:ext cx="457200" cy="0"/>
+            <a:ext cx="2194560" cy="0"/>
           </a:xfrm>
           <a:prstGeom prst="line">
             <a:avLst/>
@@ -4710,50 +4710,15 @@
           </a:fontRef>
         </p:style>
       </p:cxnSp>
-      <p:cxnSp>
-        <p:nvCxnSpPr>
-          <p:cNvPr id="14" name="Connector 13"/>
-          <p:cNvCxnSpPr/>
-          <p:nvPr/>
-        </p:nvCxnSpPr>
-        <p:spPr>
-          <a:xfrm>
-            <a:off x="9692640" y="2286000"/>
-            <a:ext cx="365760" cy="0"/>
-          </a:xfrm>
-          <a:prstGeom prst="line">
-            <a:avLst/>
-          </a:prstGeom>
-          <a:ln w="25400">
-            <a:solidFill>
-              <a:srgbClr val="4F5D75"/>
-            </a:solidFill>
-          </a:ln>
-        </p:spPr>
-        <p:style>
-          <a:lnRef idx="2">
-            <a:schemeClr val="accent1"/>
-          </a:lnRef>
-          <a:fillRef idx="0">
-            <a:schemeClr val="accent1"/>
-          </a:fillRef>
-          <a:effectRef idx="1">
-            <a:schemeClr val="accent1"/>
-          </a:effectRef>
-          <a:fontRef idx="minor">
-            <a:schemeClr val="tx1"/>
-          </a:fontRef>
-        </p:style>
-      </p:cxnSp>
-      <p:sp>
-        <p:nvSpPr>
-          <p:cNvPr id="15" name="TextBox 14"/>
+      <p:sp>
+        <p:nvSpPr>
+          <p:cNvPr id="14" name="TextBox 13"/>
           <p:cNvSpPr txBox="1"/>
           <p:nvPr/>
         </p:nvSpPr>
         <p:spPr>
           <a:xfrm>
-            <a:off x="822960" y="5074920"/>
+            <a:off x="822960" y="5257800"/>
             <a:ext cx="10789920" cy="320040"/>
           </a:xfrm>
           <a:prstGeom prst="rect">
@@ -4786,14 +4751,14 @@
       </p:sp>
       <p:sp>
         <p:nvSpPr>
-          <p:cNvPr id="16" name="TextBox 15"/>
+          <p:cNvPr id="15" name="TextBox 14"/>
           <p:cNvSpPr txBox="1"/>
           <p:nvPr/>
         </p:nvSpPr>
         <p:spPr>
           <a:xfrm>
-            <a:off x="822960" y="5486400"/>
-            <a:ext cx="10698480" cy="914400"/>
+            <a:off x="822960" y="5623560"/>
+            <a:ext cx="10698480" cy="731520"/>
           </a:xfrm>
           <a:prstGeom prst="rect">
             <a:avLst/>
